--- a/SDC/教学资料/课件/E1-开发环境与棕地仓库导读.pptx
+++ b/SDC/教学资料/课件/E1-开发环境与棕地仓库导读.pptx
@@ -49,8 +49,8 @@
     <p:sldId id="1042" r:id="rId30"/>
     <p:sldId id="271" r:id="rId31"/>
     <p:sldId id="2065" r:id="rId32"/>
+    <p:sldId id="1044" r:id="rId34"/>
     <p:sldId id="1043" r:id="rId33"/>
-    <p:sldId id="1044" r:id="rId34"/>
     <p:sldId id="272" r:id="rId35"/>
     <p:sldId id="1045" r:id="rId36"/>
     <p:sldId id="2066" r:id="rId37"/>
